--- a/report/Vise_Presentation_Slides.pptx
+++ b/report/Vise_Presentation_Slides.pptx
@@ -13922,7 +13922,7 @@
                 <a:cs typeface="Calibri"/>
                 <a:sym typeface="Calibri"/>
               </a:rPr>
-              <a:t>Bhagya Puppala · Jack Feen </a:t>
+              <a:t>Bhagya Puppala · Jack Feen</a:t>
             </a:r>
             <a:r>
               <a:rPr lang="en-US" sz="1850" b="1" i="0" u="none" strike="noStrike" cap="none">
@@ -13934,7 +13934,7 @@
                 <a:cs typeface="Calibri"/>
                 <a:sym typeface="Calibri"/>
               </a:rPr>
-              <a:t> · </a:t>
+              <a:t> ·</a:t>
             </a:r>
             <a:r>
               <a:rPr lang="en-US" sz="1850" b="1">
@@ -13958,7 +13958,7 @@
                 <a:cs typeface="Calibri"/>
                 <a:sym typeface="Calibri"/>
               </a:rPr>
-              <a:t>   </a:t>
+              <a:t/>
             </a:r>
             <a:endParaRPr sz="1850" b="1" i="0" u="none" strike="noStrike" cap="none">
               <a:solidFill>
@@ -14007,7 +14007,7 @@
                 <a:cs typeface="Calibri"/>
                 <a:sym typeface="Calibri"/>
               </a:rPr>
-              <a:t> · </a:t>
+              <a:t> ·</a:t>
             </a:r>
             <a:r>
               <a:rPr lang="en-US" sz="1850" b="1">
@@ -14019,7 +14019,7 @@
                 <a:cs typeface="Calibri"/>
                 <a:sym typeface="Calibri"/>
               </a:rPr>
-              <a:t> Nisha Sapkota ·  Rio Yokoyama  </a:t>
+              <a:t> Nisha Sapkota · Rio Yokoyama</a:t>
             </a:r>
             <a:endParaRPr sz="1850" b="1" i="0" u="none" strike="noStrike" cap="none">
               <a:solidFill>
@@ -14424,7 +14424,7 @@
                 <a:cs typeface="Calibri"/>
                 <a:sym typeface="Calibri"/>
               </a:rPr>
-              <a:t> Quantified tax alpha across bear, baseline, and bull regimes, confirming measurable after-tax benefits even after liquidation drag.</a:t>
+              <a:t> Quantified the net value-add of harvesting across bear, baseline, and bull regimes, decomposing it into tax saved versus replacement-ETF tracking.</a:t>
             </a:r>
             <a:endParaRPr sz="1700" dirty="0">
               <a:solidFill>
@@ -14552,7 +14552,7 @@
                 <a:cs typeface="Calibri"/>
                 <a:sym typeface="Calibri"/>
               </a:rPr>
-              <a:t> Models the full trade lifecycle including dividends, lot-level TLH, proxy swaps, execution costs, liquidation for realistic results. </a:t>
+              <a:t> Models the full trade lifecycle including dividends (optional), lot-level TLH, proxy swaps, execution costs, liquidation for realistic results. </a:t>
             </a:r>
             <a:endParaRPr sz="1700" dirty="0">
               <a:solidFill>
@@ -17484,7 +17484,7 @@
                 <a:cs typeface="Calibri"/>
                 <a:sym typeface="Calibri"/>
               </a:rPr>
-              <a:t>The additional return earned purely through tax-efficient moves like TLH, return generated not by picking better stocks, but by paying less tax.</a:t>
+              <a:t>The net value-add of harvesting versus an identical no-TLH portfolio. It combines tax saved, the tracking of the replacement ETF you must hold, and trading cost, and in our results is usually dominated by tracking rather than tax.</a:t>
             </a:r>
             <a:endParaRPr sz="1080" b="1" i="0" u="none" strike="noStrike" cap="none">
               <a:solidFill>
@@ -17861,7 +17861,7 @@
                 <a:cs typeface="Calibri"/>
                 <a:sym typeface="Calibri"/>
               </a:rPr>
-              <a:t>trade offs</a:t>
+              <a:t>trade-offs</a:t>
             </a:r>
             <a:r>
               <a:rPr lang="en-US" sz="1550" b="0" i="1" u="none" strike="noStrike" cap="none">
@@ -27852,7 +27852,7 @@
                 <a:cs typeface="Calibri"/>
                 <a:sym typeface="Calibri"/>
               </a:rPr>
-              <a:t>TLH Alpha</a:t>
+              <a:t>Net Value-Add</a:t>
             </a:r>
             <a:endParaRPr sz="1300" b="0">
               <a:solidFill>
@@ -47563,7 +47563,7 @@
                 <a:cs typeface="Calibri"/>
                 <a:sym typeface="Calibri"/>
               </a:rPr>
-              <a:t>Rank 1 = highest avg Tax Alpha across all portfolios  |  TLH threshold = 10%  |  $1M initial capital  |  35% ST / 20% LT tax rates</a:t>
+              <a:t>Rank 1 = highest avg net value-add across all portfolios  |  TLH threshold = 10%  |  $1M initial capital  |  35% ST / 20% LT tax rates</a:t>
             </a:r>
             <a:endParaRPr>
               <a:solidFill>
@@ -48613,7 +48613,7 @@
                           <a:cs typeface="Calibri"/>
                           <a:sym typeface="Calibri"/>
                         </a:rPr>
-                        <a:t>Pre-Liq Tax Alpha</a:t>
+                        <a:t>Pre-Liq Net Value-Add</a:t>
                       </a:r>
                       <a:endParaRPr sz="1300"/>
                     </a:p>
@@ -48684,7 +48684,7 @@
                           <a:cs typeface="Calibri"/>
                           <a:sym typeface="Calibri"/>
                         </a:rPr>
-                        <a:t>Post-Liq Tax Alpha</a:t>
+                        <a:t>Post-Liq Net Value-Add</a:t>
                       </a:r>
                       <a:endParaRPr sz="1300"/>
                     </a:p>
@@ -50079,7 +50079,7 @@
                 <a:cs typeface="Calibri"/>
                 <a:sym typeface="Calibri"/>
               </a:rPr>
-              <a:t>• Pre-Liq Tax Alpha ($): </a:t>
+              <a:t>• Pre-Liq Net Value-Add ($): </a:t>
             </a:r>
             <a:r>
               <a:rPr lang="en-US" sz="1200">
@@ -50091,7 +50091,7 @@
                 <a:cs typeface="Calibri"/>
                 <a:sym typeface="Calibri"/>
               </a:rPr>
-              <a:t>TLH NAV − No-TLH NAV while the portfolio remains invested; reflects the compounding benefit of tax deferral </a:t>
+              <a:t>TLH NAV − No-TLH NAV while the portfolio remains invested; reflects tax saved plus how the replacement ETFs tracked while invested (usually tracking-dominated) </a:t>
             </a:r>
             <a:endParaRPr sz="1200">
               <a:solidFill>
@@ -50123,7 +50123,7 @@
                 <a:cs typeface="Calibri"/>
                 <a:sym typeface="Calibri"/>
               </a:rPr>
-              <a:t>• Post-Liq Tax Alpha ($): </a:t>
+              <a:t>• Post-Liq Net Value-Add ($): </a:t>
             </a:r>
             <a:r>
               <a:rPr lang="en-US" sz="1200">
@@ -50485,7 +50485,7 @@
                 <a:cs typeface="Calibri"/>
                 <a:sym typeface="Calibri"/>
               </a:rPr>
-              <a:t>Tax alphas for the best-performing rebalancing strategy in each market regime  |  $1M initial capital</a:t>
+              <a:t>Net value-add for the best-performing rebalancing strategy in each market regime  |  $1M initial capital</a:t>
             </a:r>
             <a:endParaRPr>
               <a:solidFill>

--- a/report/Vise_Presentation_Slides.pptx
+++ b/report/Vise_Presentation_Slides.pptx
@@ -273,7 +273,7 @@
       </p15:sldGuideLst>
     </p:ext>
     <p:ext uri="GoogleSlidesCustomDataVersion2">
-      <go:slidesCustomData xmlns:go="http://customooxmlschemas.google.com/" xmlns:ahyp="http://schemas.microsoft.com/office/drawing/2018/hyperlinkcolor" xmlns:p15="http://schemas.microsoft.com/office/powerpoint/2012/main" xmlns:p14="http://schemas.microsoft.com/office/powerpoint/2010/main" xmlns:com="http://schemas.openxmlformats.org/drawingml/2006/compatibility" xmlns:pvml="urn:schemas-microsoft-com:office:powerpoint" xmlns:v="urn:schemas-microsoft-com:vml" xmlns:o="urn:schemas-microsoft-com:office:office" xmlns:dgm="http://schemas.openxmlformats.org/drawingml/2006/diagram" xmlns:c="http://schemas.openxmlformats.org/drawingml/2006/chart" xmlns:mv="urn:schemas-microsoft-com:mac:vml" xmlns:mc="http://schemas.openxmlformats.org/markup-compatibility/2006" xmlns="" r:id="rId19" roundtripDataSignature="AMtx7mj/VFSrjrujdcXr2DLjSKYkvxmP9w=="/>
+      <go:slidesCustomData xmlns="" xmlns:mc="http://schemas.openxmlformats.org/markup-compatibility/2006" xmlns:mv="urn:schemas-microsoft-com:mac:vml" xmlns:c="http://schemas.openxmlformats.org/drawingml/2006/chart" xmlns:dgm="http://schemas.openxmlformats.org/drawingml/2006/diagram" xmlns:o="urn:schemas-microsoft-com:office:office" xmlns:v="urn:schemas-microsoft-com:vml" xmlns:pvml="urn:schemas-microsoft-com:office:powerpoint" xmlns:com="http://schemas.openxmlformats.org/drawingml/2006/compatibility" xmlns:p14="http://schemas.microsoft.com/office/powerpoint/2010/main" xmlns:p15="http://schemas.microsoft.com/office/powerpoint/2012/main" xmlns:ahyp="http://schemas.microsoft.com/office/drawing/2018/hyperlinkcolor" xmlns:go="http://customooxmlschemas.google.com/" r:id="rId19" roundtripDataSignature="AMtx7mj/VFSrjrujdcXr2DLjSKYkvxmP9w=="/>
     </p:ext>
   </p:extLst>
 </p:presentation>
@@ -1937,8 +1937,8 @@
         </p:nvSpPr>
         <p:spPr>
           <a:xfrm>
-            <a:off x="1714333" y="685800"/>
-            <a:ext cx="3430200" cy="3429000"/>
+            <a:off x="1144588" y="685800"/>
+            <a:ext cx="4570412" cy="3429000"/>
           </a:xfrm>
           <a:custGeom>
             <a:avLst/>
@@ -13948,18 +13948,6 @@
               </a:rPr>
               <a:t>Joshua Ringler</a:t>
             </a:r>
-            <a:r>
-              <a:rPr lang="en-US" sz="1850" b="1" i="0" u="none" strike="noStrike" cap="none">
-                <a:solidFill>
-                  <a:srgbClr val="6B8FAF"/>
-                </a:solidFill>
-                <a:latin typeface="Calibri"/>
-                <a:ea typeface="Calibri"/>
-                <a:cs typeface="Calibri"/>
-                <a:sym typeface="Calibri"/>
-              </a:rPr>
-              <a:t/>
-            </a:r>
             <a:endParaRPr sz="1850" b="1" i="0" u="none" strike="noStrike" cap="none">
               <a:solidFill>
                 <a:srgbClr val="6B8FAF"/>
@@ -14403,7 +14391,7 @@
               <a:buChar char="●"/>
             </a:pPr>
             <a:r>
-              <a:rPr lang="en-US" sz="1700" b="1" dirty="0">
+              <a:rPr lang="en-US" sz="1600" b="1" dirty="0">
                 <a:solidFill>
                   <a:srgbClr val="1A1A1A"/>
                 </a:solidFill>
@@ -14415,7 +14403,7 @@
               <a:t>Empirical Validation of TLH Value:</a:t>
             </a:r>
             <a:r>
-              <a:rPr lang="en-US" sz="1700" dirty="0">
+              <a:rPr lang="en-US" sz="1600" dirty="0">
                 <a:solidFill>
                   <a:srgbClr val="1A1A1A"/>
                 </a:solidFill>
@@ -14426,7 +14414,7 @@
               </a:rPr>
               <a:t> Quantified the net value-add of harvesting across bear, baseline, and bull regimes, decomposing it into tax saved versus replacement-ETF tracking.</a:t>
             </a:r>
-            <a:endParaRPr sz="1700" dirty="0">
+            <a:endParaRPr sz="1600" dirty="0">
               <a:solidFill>
                 <a:srgbClr val="1A1A1A"/>
               </a:solidFill>
@@ -14455,7 +14443,7 @@
               <a:buChar char="●"/>
             </a:pPr>
             <a:r>
-              <a:rPr lang="en-US" sz="1700" b="1" dirty="0">
+              <a:rPr lang="en-US" sz="1600" b="1" dirty="0">
                 <a:solidFill>
                   <a:srgbClr val="1A1A1A"/>
                 </a:solidFill>
@@ -14467,7 +14455,7 @@
               <a:t>Regime-Specific Strategy Guidance:</a:t>
             </a:r>
             <a:r>
-              <a:rPr lang="en-US" sz="1700" dirty="0">
+              <a:rPr lang="en-US" sz="1600" dirty="0">
                 <a:solidFill>
                   <a:srgbClr val="1A1A1A"/>
                 </a:solidFill>
@@ -14479,7 +14467,7 @@
               <a:t> 20+ years of </a:t>
             </a:r>
             <a:r>
-              <a:rPr lang="en-US" sz="1700" dirty="0" err="1">
+              <a:rPr lang="en-US" sz="1600" dirty="0" err="1">
                 <a:solidFill>
                   <a:srgbClr val="1A1A1A"/>
                 </a:solidFill>
@@ -14491,7 +14479,7 @@
               <a:t>backtests</a:t>
             </a:r>
             <a:r>
-              <a:rPr lang="en-US" sz="1700" dirty="0">
+              <a:rPr lang="en-US" sz="1600" dirty="0">
                 <a:solidFill>
                   <a:srgbClr val="1A1A1A"/>
                 </a:solidFill>
@@ -14502,7 +14490,7 @@
               </a:rPr>
               <a:t> pinpoint the right strategy for each market, from relative thresholds in volatile regimes to calendar rebalancing in sustained bulls.</a:t>
             </a:r>
-            <a:endParaRPr sz="1700" dirty="0">
+            <a:endParaRPr sz="1600" dirty="0">
               <a:solidFill>
                 <a:srgbClr val="1A1A1A"/>
               </a:solidFill>
@@ -14531,7 +14519,7 @@
               <a:buChar char="●"/>
             </a:pPr>
             <a:r>
-              <a:rPr lang="en-US" sz="1700" b="1" dirty="0">
+              <a:rPr lang="en-US" sz="1600" b="1" dirty="0">
                 <a:solidFill>
                   <a:srgbClr val="1A1A1A"/>
                 </a:solidFill>
@@ -14543,7 +14531,7 @@
               <a:t>End-to-End Simulation:</a:t>
             </a:r>
             <a:r>
-              <a:rPr lang="en-US" sz="1700" dirty="0">
+              <a:rPr lang="en-US" sz="1600" dirty="0">
                 <a:solidFill>
                   <a:srgbClr val="1A1A1A"/>
                 </a:solidFill>
@@ -14554,7 +14542,7 @@
               </a:rPr>
               <a:t> Models the full trade lifecycle including dividends (optional), lot-level TLH, proxy swaps, execution costs, liquidation for realistic results. </a:t>
             </a:r>
-            <a:endParaRPr sz="1700" dirty="0">
+            <a:endParaRPr sz="1600" dirty="0">
               <a:solidFill>
                 <a:srgbClr val="1A1A1A"/>
               </a:solidFill>
@@ -14609,7 +14597,7 @@
               <a:buChar char="●"/>
             </a:pPr>
             <a:r>
-              <a:rPr lang="en-US" sz="1700" b="1" dirty="0">
+              <a:rPr lang="en-US" sz="1600" b="1" dirty="0">
                 <a:solidFill>
                   <a:srgbClr val="1A1A1A"/>
                 </a:solidFill>
@@ -14621,7 +14609,7 @@
               <a:t>The Constraint:</a:t>
             </a:r>
             <a:r>
-              <a:rPr lang="en-US" sz="1700" dirty="0">
+              <a:rPr lang="en-US" sz="1600" dirty="0">
                 <a:solidFill>
                   <a:srgbClr val="1A1A1A"/>
                 </a:solidFill>
@@ -14632,7 +14620,7 @@
               </a:rPr>
               <a:t> The current framework is inherently backward-looking; it analyzes past performance but cannot predict current transitions between bull and bear markets.</a:t>
             </a:r>
-            <a:endParaRPr sz="1700" dirty="0">
+            <a:endParaRPr sz="1600" dirty="0">
               <a:solidFill>
                 <a:srgbClr val="1A1A1A"/>
               </a:solidFill>
@@ -14661,7 +14649,7 @@
               <a:buChar char="●"/>
             </a:pPr>
             <a:r>
-              <a:rPr lang="en-US" sz="1700" b="1" dirty="0">
+              <a:rPr lang="en-US" sz="1600" b="1" dirty="0">
                 <a:solidFill>
                   <a:srgbClr val="1A1A1A"/>
                 </a:solidFill>
@@ -14673,7 +14661,7 @@
               <a:t>The Solution (Future Work):</a:t>
             </a:r>
             <a:r>
-              <a:rPr lang="en-US" sz="1700" dirty="0">
+              <a:rPr lang="en-US" sz="1600" dirty="0">
                 <a:solidFill>
                   <a:srgbClr val="1A1A1A"/>
                 </a:solidFill>
@@ -14684,7 +14672,7 @@
               </a:rPr>
               <a:t> Develop and integrate forward-looking predictive signals to drive dynamic, optimal portfolio balancing ahead of market shifts.</a:t>
             </a:r>
-            <a:endParaRPr sz="1700" dirty="0">
+            <a:endParaRPr sz="1600" dirty="0">
               <a:solidFill>
                 <a:srgbClr val="1A1A1A"/>
               </a:solidFill>
@@ -47642,7 +47630,7 @@
         </p:nvSpPr>
         <p:spPr>
           <a:xfrm>
-            <a:off x="185372" y="1280112"/>
+            <a:off x="172963" y="1195072"/>
             <a:ext cx="2751300" cy="274500"/>
           </a:xfrm>
           <a:prstGeom prst="rect">
@@ -47669,7 +47657,7 @@
               <a:buNone/>
             </a:pPr>
             <a:r>
-              <a:rPr lang="en-US" sz="1124" b="1" i="0" u="none" strike="noStrike" cap="none">
+              <a:rPr lang="en-US" sz="1124" b="1" i="0" u="none" strike="noStrike" cap="none" dirty="0">
                 <a:solidFill>
                   <a:srgbClr val="1A1A1A"/>
                 </a:solidFill>
@@ -47680,7 +47668,7 @@
               </a:rPr>
               <a:t>Bear Market</a:t>
             </a:r>
-            <a:endParaRPr sz="1838">
+            <a:endParaRPr sz="1838" dirty="0">
               <a:solidFill>
                 <a:srgbClr val="1A1A1A"/>
               </a:solidFill>
@@ -47696,7 +47684,7 @@
         </p:nvSpPr>
         <p:spPr>
           <a:xfrm>
-            <a:off x="185372" y="1540208"/>
+            <a:off x="172963" y="1469572"/>
             <a:ext cx="2751300" cy="430500"/>
           </a:xfrm>
           <a:prstGeom prst="rect">
@@ -47723,7 +47711,7 @@
               <a:buNone/>
             </a:pPr>
             <a:r>
-              <a:rPr lang="en-US" sz="1069" b="0" i="1" u="none" strike="noStrike" cap="none">
+              <a:rPr lang="en-US" sz="1069" b="0" i="1" u="none" strike="noStrike" cap="none" dirty="0">
                 <a:solidFill>
                   <a:srgbClr val="1A1A1A"/>
                 </a:solidFill>
@@ -47735,7 +47723,7 @@
               <a:t>Relative &amp; tight thresholds win</a:t>
             </a:r>
             <a:r>
-              <a:rPr lang="en-US" sz="1069" i="1">
+              <a:rPr lang="en-US" sz="1069" i="1" dirty="0">
                 <a:solidFill>
                   <a:srgbClr val="1A1A1A"/>
                 </a:solidFill>
@@ -47747,7 +47735,7 @@
               <a:t>, </a:t>
             </a:r>
             <a:r>
-              <a:rPr lang="en-US" sz="1069" b="0" i="1" u="none" strike="noStrike" cap="none">
+              <a:rPr lang="en-US" sz="1069" b="0" i="1" u="none" strike="noStrike" cap="none" dirty="0">
                 <a:solidFill>
                   <a:srgbClr val="1A1A1A"/>
                 </a:solidFill>
@@ -47758,7 +47746,7 @@
               </a:rPr>
               <a:t>volatile markets create frequent harvest opportunities</a:t>
             </a:r>
-            <a:endParaRPr sz="1838"/>
+            <a:endParaRPr sz="1838" dirty="0"/>
           </a:p>
         </p:txBody>
       </p:sp>
@@ -47831,7 +47819,7 @@
         </p:nvSpPr>
         <p:spPr>
           <a:xfrm>
-            <a:off x="3189783" y="1280112"/>
+            <a:off x="3189783" y="1195072"/>
             <a:ext cx="2751300" cy="274500"/>
           </a:xfrm>
           <a:prstGeom prst="rect">
@@ -47858,7 +47846,7 @@
               <a:buNone/>
             </a:pPr>
             <a:r>
-              <a:rPr lang="en-US" sz="1124" b="1" i="0" u="none" strike="noStrike" cap="none">
+              <a:rPr lang="en-US" sz="1124" b="1" i="0" u="none" strike="noStrike" cap="none" dirty="0">
                 <a:solidFill>
                   <a:srgbClr val="1A1A1A"/>
                 </a:solidFill>
@@ -47869,7 +47857,7 @@
               </a:rPr>
               <a:t>Baseline Market</a:t>
             </a:r>
-            <a:endParaRPr sz="1838">
+            <a:endParaRPr sz="1838" dirty="0">
               <a:solidFill>
                 <a:srgbClr val="1A1A1A"/>
               </a:solidFill>
@@ -47885,7 +47873,7 @@
         </p:nvSpPr>
         <p:spPr>
           <a:xfrm>
-            <a:off x="3189783" y="1540208"/>
+            <a:off x="3189783" y="1457858"/>
             <a:ext cx="2751300" cy="595200"/>
           </a:xfrm>
           <a:prstGeom prst="rect">
@@ -47912,7 +47900,7 @@
               <a:buNone/>
             </a:pPr>
             <a:r>
-              <a:rPr lang="en-US" sz="1069" b="0" i="1" u="none" strike="noStrike" cap="none">
+              <a:rPr lang="en-US" sz="1069" b="0" i="1" u="none" strike="noStrike" cap="none" dirty="0">
                 <a:solidFill>
                   <a:srgbClr val="1A1A1A"/>
                 </a:solidFill>
@@ -47923,31 +47911,7 @@
               </a:rPr>
               <a:t>Calendar (quarterly) rebalancing leads here; harvesting still cuts tax, but replacement-ETF tracking decides the net and erodes the benefit after liquidation</a:t>
             </a:r>
-            <a:r>
-              <a:rPr lang="en-US" sz="1069" i="1">
-                <a:solidFill>
-                  <a:srgbClr val="1A1A1A"/>
-                </a:solidFill>
-                <a:latin typeface="Calibri"/>
-                <a:ea typeface="Calibri"/>
-                <a:cs typeface="Calibri"/>
-                <a:sym typeface="Calibri"/>
-              </a:rPr>
-              <a:t/>
-            </a:r>
-            <a:r>
-              <a:rPr lang="en-US" sz="1069" b="0" i="1" u="none" strike="noStrike" cap="none">
-                <a:solidFill>
-                  <a:srgbClr val="1A1A1A"/>
-                </a:solidFill>
-                <a:latin typeface="Calibri"/>
-                <a:ea typeface="Calibri"/>
-                <a:cs typeface="Calibri"/>
-                <a:sym typeface="Calibri"/>
-              </a:rPr>
-              <a:t/>
-            </a:r>
-            <a:endParaRPr sz="1838"/>
+            <a:endParaRPr sz="1838" dirty="0"/>
           </a:p>
         </p:txBody>
       </p:sp>
@@ -48020,7 +47984,7 @@
         </p:nvSpPr>
         <p:spPr>
           <a:xfrm>
-            <a:off x="6219737" y="1280112"/>
+            <a:off x="6219737" y="1164336"/>
             <a:ext cx="2751300" cy="274500"/>
           </a:xfrm>
           <a:prstGeom prst="rect">
@@ -48047,7 +48011,7 @@
               <a:buNone/>
             </a:pPr>
             <a:r>
-              <a:rPr lang="en-US" sz="1124" b="1" i="0" u="none" strike="noStrike" cap="none">
+              <a:rPr lang="en-US" sz="1124" b="1" i="0" u="none" strike="noStrike" cap="none" dirty="0">
                 <a:solidFill>
                   <a:srgbClr val="1A1A1A"/>
                 </a:solidFill>
@@ -48058,7 +48022,7 @@
               </a:rPr>
               <a:t>Long-Horizon</a:t>
             </a:r>
-            <a:endParaRPr sz="1838">
+            <a:endParaRPr sz="1838" dirty="0">
               <a:solidFill>
                 <a:srgbClr val="1A1A1A"/>
               </a:solidFill>
@@ -48074,8 +48038,8 @@
         </p:nvSpPr>
         <p:spPr>
           <a:xfrm>
-            <a:off x="6219737" y="1540208"/>
-            <a:ext cx="2751300" cy="430500"/>
+            <a:off x="6219737" y="1365564"/>
+            <a:ext cx="2751300" cy="870872"/>
           </a:xfrm>
           <a:prstGeom prst="rect">
             <a:avLst/>
@@ -48092,6 +48056,9 @@
           <a:lstStyle/>
           <a:p>
             <a:pPr marL="0" marR="0" lvl="0" indent="0" algn="l" rtl="0">
+              <a:lnSpc>
+                <a:spcPts val="1160"/>
+              </a:lnSpc>
               <a:spcBef>
                 <a:spcPts val="0"/>
               </a:spcBef>
@@ -48101,7 +48068,7 @@
               <a:buNone/>
             </a:pPr>
             <a:r>
-              <a:rPr lang="en-US" sz="1069" b="0" i="1" u="none" strike="noStrike" cap="none">
+              <a:rPr lang="en-US" sz="1050" b="0" i="1" u="none" strike="noStrike" cap="none" dirty="0">
                 <a:solidFill>
                   <a:srgbClr val="1A1A1A"/>
                 </a:solidFill>
@@ -48112,31 +48079,7 @@
               </a:rPr>
               <a:t>Low-frequency rebalancing wins: yearly and wide bands compound with low friction. Over long holds replacement-ETF tracking (not gain realization) drives the net; monthly and quarterly add churn and cost</a:t>
             </a:r>
-            <a:r>
-              <a:rPr lang="en-US" sz="1069" i="1">
-                <a:solidFill>
-                  <a:srgbClr val="1A1A1A"/>
-                </a:solidFill>
-                <a:latin typeface="Calibri"/>
-                <a:ea typeface="Calibri"/>
-                <a:cs typeface="Calibri"/>
-                <a:sym typeface="Calibri"/>
-              </a:rPr>
-              <a:t/>
-            </a:r>
-            <a:r>
-              <a:rPr lang="en-US" sz="1069" b="0" i="1" u="none" strike="noStrike" cap="none">
-                <a:solidFill>
-                  <a:srgbClr val="1A1A1A"/>
-                </a:solidFill>
-                <a:latin typeface="Calibri"/>
-                <a:ea typeface="Calibri"/>
-                <a:cs typeface="Calibri"/>
-                <a:sym typeface="Calibri"/>
-              </a:rPr>
-              <a:t/>
-            </a:r>
-            <a:endParaRPr sz="1838"/>
+            <a:endParaRPr sz="1050" dirty="0"/>
           </a:p>
         </p:txBody>
       </p:sp>
@@ -48981,14 +48924,6 @@
                         </a:rPr>
                         <a:t>+$4,125</a:t>
                       </a:r>
-                      <a:r>
-                        <a:rPr lang="en-US" sz="1200">
-                          <a:solidFill>
-                            <a:srgbClr val="146B3A"/>
-                          </a:solidFill>
-                        </a:rPr>
-                        <a:t/>
-                      </a:r>
                       <a:endParaRPr sz="1200"/>
                     </a:p>
                   </a:txBody>
@@ -49220,14 +49155,6 @@
                           <a:sym typeface="Calibri"/>
                         </a:rPr>
                         <a:t>+$4,600</a:t>
-                      </a:r>
-                      <a:r>
-                        <a:rPr lang="en-US" sz="1200">
-                          <a:solidFill>
-                            <a:srgbClr val="146B3A"/>
-                          </a:solidFill>
-                        </a:rPr>
-                        <a:t/>
                       </a:r>
                       <a:endParaRPr sz="1200"/>
                     </a:p>
@@ -49516,14 +49443,6 @@
                         </a:rPr>
                         <a:t>+$4,674</a:t>
                       </a:r>
-                      <a:r>
-                        <a:rPr lang="en-US" sz="1200">
-                          <a:solidFill>
-                            <a:srgbClr val="146B3A"/>
-                          </a:solidFill>
-                        </a:rPr>
-                        <a:t/>
-                      </a:r>
                       <a:endParaRPr sz="1200"/>
                     </a:p>
                   </a:txBody>
@@ -49594,14 +49513,6 @@
                           <a:sym typeface="Calibri"/>
                         </a:rPr>
                         <a:t>+$2,372</a:t>
-                      </a:r>
-                      <a:r>
-                        <a:rPr lang="en-US" sz="1200">
-                          <a:solidFill>
-                            <a:srgbClr val="146B3A"/>
-                          </a:solidFill>
-                        </a:rPr>
-                        <a:t/>
                       </a:r>
                       <a:endParaRPr sz="1200"/>
                     </a:p>
@@ -49782,8 +49693,8 @@
         </p:nvSpPr>
         <p:spPr>
           <a:xfrm>
-            <a:off x="149575" y="4414850"/>
-            <a:ext cx="8853600" cy="2009400"/>
+            <a:off x="112200" y="4414850"/>
+            <a:ext cx="8890975" cy="2052829"/>
           </a:xfrm>
           <a:prstGeom prst="rect">
             <a:avLst/>
@@ -49812,7 +49723,7 @@
               <a:buNone/>
             </a:pPr>
             <a:r>
-              <a:rPr lang="en-US" sz="1750" b="1">
+              <a:rPr lang="en-US" sz="1600" b="1" dirty="0">
                 <a:solidFill>
                   <a:srgbClr val="1A1A1A"/>
                 </a:solidFill>
@@ -49821,9 +49732,33 @@
                 <a:cs typeface="Calibri"/>
                 <a:sym typeface="Calibri"/>
               </a:rPr>
-              <a:t>TLH Insights From All Backtest Combinations:  </a:t>
+              <a:t>TLH Insights From All </a:t>
             </a:r>
-            <a:endParaRPr sz="1750" b="1">
+            <a:r>
+              <a:rPr lang="en-US" sz="1600" b="1" dirty="0" err="1">
+                <a:solidFill>
+                  <a:srgbClr val="1A1A1A"/>
+                </a:solidFill>
+                <a:latin typeface="Calibri"/>
+                <a:ea typeface="Calibri"/>
+                <a:cs typeface="Calibri"/>
+                <a:sym typeface="Calibri"/>
+              </a:rPr>
+              <a:t>Backtest</a:t>
+            </a:r>
+            <a:r>
+              <a:rPr lang="en-US" sz="1600" b="1" dirty="0">
+                <a:solidFill>
+                  <a:srgbClr val="1A1A1A"/>
+                </a:solidFill>
+                <a:latin typeface="Calibri"/>
+                <a:ea typeface="Calibri"/>
+                <a:cs typeface="Calibri"/>
+                <a:sym typeface="Calibri"/>
+              </a:rPr>
+              <a:t> Combinations:  </a:t>
+            </a:r>
+            <a:endParaRPr sz="1600" b="1" dirty="0">
               <a:solidFill>
                 <a:srgbClr val="1A1A1A"/>
               </a:solidFill>
@@ -49836,7 +49771,7 @@
           <a:p>
             <a:pPr marL="457200" marR="0" lvl="0" indent="-320675" algn="l" rtl="0">
               <a:lnSpc>
-                <a:spcPct val="140000"/>
+                <a:spcPts val="1840"/>
               </a:lnSpc>
               <a:spcBef>
                 <a:spcPts val="0"/>
@@ -49852,7 +49787,7 @@
               <a:buChar char="●"/>
             </a:pPr>
             <a:r>
-              <a:rPr lang="en-US" sz="1450">
+              <a:rPr lang="en-US" sz="1200" dirty="0">
                 <a:solidFill>
                   <a:srgbClr val="1A1A1A"/>
                 </a:solidFill>
@@ -49863,7 +49798,7 @@
               </a:rPr>
               <a:t>TLH benefits heavily depend on frequency, portfolio holdings, time horizon, and market regime </a:t>
             </a:r>
-            <a:endParaRPr sz="1450">
+            <a:endParaRPr sz="1200" dirty="0">
               <a:solidFill>
                 <a:srgbClr val="1A1A1A"/>
               </a:solidFill>
@@ -49876,7 +49811,7 @@
           <a:p>
             <a:pPr marL="457200" marR="0" lvl="0" indent="-320675" algn="l" rtl="0">
               <a:lnSpc>
-                <a:spcPct val="150000"/>
+                <a:spcPts val="1840"/>
               </a:lnSpc>
               <a:spcBef>
                 <a:spcPts val="0"/>
@@ -49892,7 +49827,7 @@
               <a:buChar char="●"/>
             </a:pPr>
             <a:r>
-              <a:rPr lang="en-US" sz="1450">
+              <a:rPr lang="en-US" sz="1200" dirty="0">
                 <a:solidFill>
                   <a:srgbClr val="1A1A1A"/>
                 </a:solidFill>
@@ -49903,7 +49838,7 @@
               </a:rPr>
               <a:t>Lower frequency generally improves TLH quality (less execution cost, wash sale risk, and reinvestment drag)</a:t>
             </a:r>
-            <a:endParaRPr sz="1450">
+            <a:endParaRPr sz="1200" dirty="0">
               <a:solidFill>
                 <a:srgbClr val="1A1A1A"/>
               </a:solidFill>
@@ -49916,7 +49851,7 @@
           <a:p>
             <a:pPr marL="457200" marR="0" lvl="0" indent="-320675" algn="l" rtl="0">
               <a:lnSpc>
-                <a:spcPct val="150000"/>
+                <a:spcPts val="1840"/>
               </a:lnSpc>
               <a:spcBef>
                 <a:spcPts val="0"/>
@@ -49932,7 +49867,7 @@
               <a:buChar char="●"/>
             </a:pPr>
             <a:r>
-              <a:rPr lang="en-US" sz="1450">
+              <a:rPr lang="en-US" sz="1200" dirty="0">
                 <a:solidFill>
                   <a:srgbClr val="1A1A1A"/>
                 </a:solidFill>
@@ -49943,7 +49878,7 @@
               </a:rPr>
               <a:t>Net value-add is decided by replacement-ETF tracking: harvesting reliably cuts taxes, but a poorly tracking wash-sale substitute can erase or reverse the benefit </a:t>
             </a:r>
-            <a:endParaRPr sz="1450">
+            <a:endParaRPr sz="1200" dirty="0">
               <a:solidFill>
                 <a:srgbClr val="1A1A1A"/>
               </a:solidFill>
@@ -49956,7 +49891,7 @@
           <a:p>
             <a:pPr marL="457200" marR="0" lvl="0" indent="-320675" algn="l" rtl="0">
               <a:lnSpc>
-                <a:spcPct val="150000"/>
+                <a:spcPts val="1840"/>
               </a:lnSpc>
               <a:spcBef>
                 <a:spcPts val="0"/>
@@ -49972,7 +49907,7 @@
               <a:buChar char="●"/>
             </a:pPr>
             <a:r>
-              <a:rPr lang="en-US" sz="1450">
+              <a:rPr lang="en-US" sz="1200" dirty="0">
                 <a:solidFill>
                   <a:srgbClr val="1A1A1A"/>
                 </a:solidFill>
@@ -49983,7 +49918,7 @@
               </a:rPr>
               <a:t>Diversified portfolios with closely tracking replacements gain most; style mismatches (a growth sleeve swapped into a broad fund) drove the largest losses over long holds </a:t>
             </a:r>
-            <a:endParaRPr sz="1450">
+            <a:endParaRPr sz="1200" dirty="0">
               <a:solidFill>
                 <a:srgbClr val="1A1A1A"/>
               </a:solidFill>
@@ -49996,7 +49931,7 @@
           <a:p>
             <a:pPr marL="457200" marR="0" lvl="0" indent="-320675" algn="l" rtl="0">
               <a:lnSpc>
-                <a:spcPct val="150000"/>
+                <a:spcPts val="1840"/>
               </a:lnSpc>
               <a:spcBef>
                 <a:spcPts val="0"/>
@@ -50012,7 +49947,7 @@
               <a:buChar char="●"/>
             </a:pPr>
             <a:r>
-              <a:rPr lang="en-US" sz="1450">
+              <a:rPr lang="en-US" sz="1200" dirty="0">
                 <a:solidFill>
                   <a:srgbClr val="1A1A1A"/>
                 </a:solidFill>
@@ -50023,7 +49958,7 @@
               </a:rPr>
               <a:t>Bull markets generally narrow the advantage </a:t>
             </a:r>
-            <a:endParaRPr sz="1450">
+            <a:endParaRPr sz="1200" dirty="0">
               <a:solidFill>
                 <a:srgbClr val="1A1A1A"/>
               </a:solidFill>
@@ -50043,8 +49978,8 @@
         </p:nvSpPr>
         <p:spPr>
           <a:xfrm>
-            <a:off x="105025" y="3928084"/>
-            <a:ext cx="9031800" cy="461700"/>
+            <a:off x="112200" y="3851168"/>
+            <a:ext cx="9031800" cy="615513"/>
           </a:xfrm>
           <a:prstGeom prst="rect">
             <a:avLst/>
@@ -50070,7 +50005,7 @@
               <a:buNone/>
             </a:pPr>
             <a:r>
-              <a:rPr lang="en-US" sz="1200" b="1">
+              <a:rPr lang="en-US" sz="1200" b="1" dirty="0">
                 <a:solidFill>
                   <a:srgbClr val="1A1A1A"/>
                 </a:solidFill>
@@ -50079,10 +50014,46 @@
                 <a:cs typeface="Calibri"/>
                 <a:sym typeface="Calibri"/>
               </a:rPr>
-              <a:t>• Pre-Liq Net Value-Add ($): </a:t>
+              <a:t>• </a:t>
             </a:r>
             <a:r>
-              <a:rPr lang="en-US" sz="1200">
+              <a:rPr lang="en-US" sz="1100" b="1" dirty="0">
+                <a:solidFill>
+                  <a:srgbClr val="1A1A1A"/>
+                </a:solidFill>
+                <a:latin typeface="Calibri"/>
+                <a:ea typeface="Calibri"/>
+                <a:cs typeface="Calibri"/>
+                <a:sym typeface="Calibri"/>
+              </a:rPr>
+              <a:t>Pre-</a:t>
+            </a:r>
+            <a:r>
+              <a:rPr lang="en-US" sz="1100" b="1" dirty="0" err="1">
+                <a:solidFill>
+                  <a:srgbClr val="1A1A1A"/>
+                </a:solidFill>
+                <a:latin typeface="Calibri"/>
+                <a:ea typeface="Calibri"/>
+                <a:cs typeface="Calibri"/>
+                <a:sym typeface="Calibri"/>
+              </a:rPr>
+              <a:t>Liq</a:t>
+            </a:r>
+            <a:r>
+              <a:rPr lang="en-US" sz="1100" b="1" dirty="0">
+                <a:solidFill>
+                  <a:srgbClr val="1A1A1A"/>
+                </a:solidFill>
+                <a:latin typeface="Calibri"/>
+                <a:ea typeface="Calibri"/>
+                <a:cs typeface="Calibri"/>
+                <a:sym typeface="Calibri"/>
+              </a:rPr>
+              <a:t> Net Value-Add ($): </a:t>
+            </a:r>
+            <a:r>
+              <a:rPr lang="en-US" sz="1100" dirty="0">
                 <a:solidFill>
                   <a:srgbClr val="1A1A1A"/>
                 </a:solidFill>
@@ -50093,7 +50064,7 @@
               </a:rPr>
               <a:t>TLH NAV − No-TLH NAV while the portfolio remains invested; reflects tax saved plus how the replacement ETFs tracked while invested (usually tracking-dominated) </a:t>
             </a:r>
-            <a:endParaRPr sz="1200">
+            <a:endParaRPr sz="1100" dirty="0">
               <a:solidFill>
                 <a:srgbClr val="1A1A1A"/>
               </a:solidFill>
@@ -50114,7 +50085,7 @@
               <a:buNone/>
             </a:pPr>
             <a:r>
-              <a:rPr lang="en-US" sz="1200" b="1">
+              <a:rPr lang="en-US" sz="1100" b="1" dirty="0">
                 <a:solidFill>
                   <a:srgbClr val="1A1A1A"/>
                 </a:solidFill>
@@ -50123,10 +50094,10 @@
                 <a:cs typeface="Calibri"/>
                 <a:sym typeface="Calibri"/>
               </a:rPr>
-              <a:t>• Post-Liq Net Value-Add ($): </a:t>
+              <a:t>• Post-</a:t>
             </a:r>
             <a:r>
-              <a:rPr lang="en-US" sz="1200">
+              <a:rPr lang="en-US" sz="1100" b="1" dirty="0" err="1">
                 <a:solidFill>
                   <a:srgbClr val="1A1A1A"/>
                 </a:solidFill>
@@ -50135,9 +50106,81 @@
                 <a:cs typeface="Calibri"/>
                 <a:sym typeface="Calibri"/>
               </a:rPr>
-              <a:t>TLH Liq NAV − No-TLH Liq NAV; reflects the remaining after-tax benefit if the entire portfolio were liquidated </a:t>
+              <a:t>Liq</a:t>
             </a:r>
-            <a:endParaRPr sz="1200">
+            <a:r>
+              <a:rPr lang="en-US" sz="1100" b="1" dirty="0">
+                <a:solidFill>
+                  <a:srgbClr val="1A1A1A"/>
+                </a:solidFill>
+                <a:latin typeface="Calibri"/>
+                <a:ea typeface="Calibri"/>
+                <a:cs typeface="Calibri"/>
+                <a:sym typeface="Calibri"/>
+              </a:rPr>
+              <a:t> Net Value-Add ($): </a:t>
+            </a:r>
+            <a:r>
+              <a:rPr lang="en-US" sz="1100" dirty="0">
+                <a:solidFill>
+                  <a:srgbClr val="1A1A1A"/>
+                </a:solidFill>
+                <a:latin typeface="Calibri"/>
+                <a:ea typeface="Calibri"/>
+                <a:cs typeface="Calibri"/>
+                <a:sym typeface="Calibri"/>
+              </a:rPr>
+              <a:t>TLH </a:t>
+            </a:r>
+            <a:r>
+              <a:rPr lang="en-US" sz="1100" dirty="0" err="1">
+                <a:solidFill>
+                  <a:srgbClr val="1A1A1A"/>
+                </a:solidFill>
+                <a:latin typeface="Calibri"/>
+                <a:ea typeface="Calibri"/>
+                <a:cs typeface="Calibri"/>
+                <a:sym typeface="Calibri"/>
+              </a:rPr>
+              <a:t>Liq</a:t>
+            </a:r>
+            <a:r>
+              <a:rPr lang="en-US" sz="1100" dirty="0">
+                <a:solidFill>
+                  <a:srgbClr val="1A1A1A"/>
+                </a:solidFill>
+                <a:latin typeface="Calibri"/>
+                <a:ea typeface="Calibri"/>
+                <a:cs typeface="Calibri"/>
+                <a:sym typeface="Calibri"/>
+              </a:rPr>
+              <a:t> NAV − No-TLH </a:t>
+            </a:r>
+            <a:r>
+              <a:rPr lang="en-US" sz="1100" dirty="0" err="1">
+                <a:solidFill>
+                  <a:srgbClr val="1A1A1A"/>
+                </a:solidFill>
+                <a:latin typeface="Calibri"/>
+                <a:ea typeface="Calibri"/>
+                <a:cs typeface="Calibri"/>
+                <a:sym typeface="Calibri"/>
+              </a:rPr>
+              <a:t>Liq</a:t>
+            </a:r>
+            <a:r>
+              <a:rPr lang="en-US" sz="1100" dirty="0">
+                <a:solidFill>
+                  <a:srgbClr val="1A1A1A"/>
+                </a:solidFill>
+                <a:latin typeface="Calibri"/>
+                <a:ea typeface="Calibri"/>
+                <a:cs typeface="Calibri"/>
+                <a:sym typeface="Calibri"/>
+              </a:rPr>
+              <a:t> NAV; reflects the remaining after-tax benefit if the entire portfolio were liquidated </a:t>
+            </a:r>
+            <a:endParaRPr sz="1100" dirty="0">
               <a:solidFill>
                 <a:srgbClr val="1A1A1A"/>
               </a:solidFill>
